--- a/джава кино.pptx
+++ b/джава кино.pptx
@@ -115,6 +115,11 @@
       </a:defRPr>
     </a:lvl9pPr>
   </p:defaultTextStyle>
+  <p:extLst>
+    <p:ext uri="{EFAFB233-063F-42B5-8137-9DF3F51BA10A}">
+      <p15:sldGuideLst xmlns:p15="http://schemas.microsoft.com/office/powerpoint/2012/main"/>
+    </p:ext>
+  </p:extLst>
 </p:presentation>
 </file>
 
@@ -249,7 +254,7 @@
           <a:p>
             <a:fld id="{49EED7A0-508C-42DE-B7A9-52DA1C7DA46A}" type="datetimeFigureOut">
               <a:rPr lang="ru-RU" smtClean="0"/>
-              <a:t>07.06.2026</a:t>
+              <a:t>08.06.2026</a:t>
             </a:fld>
             <a:endParaRPr lang="ru-RU"/>
           </a:p>
@@ -419,7 +424,7 @@
           <a:p>
             <a:fld id="{49EED7A0-508C-42DE-B7A9-52DA1C7DA46A}" type="datetimeFigureOut">
               <a:rPr lang="ru-RU" smtClean="0"/>
-              <a:t>07.06.2026</a:t>
+              <a:t>08.06.2026</a:t>
             </a:fld>
             <a:endParaRPr lang="ru-RU"/>
           </a:p>
@@ -599,7 +604,7 @@
           <a:p>
             <a:fld id="{49EED7A0-508C-42DE-B7A9-52DA1C7DA46A}" type="datetimeFigureOut">
               <a:rPr lang="ru-RU" smtClean="0"/>
-              <a:t>07.06.2026</a:t>
+              <a:t>08.06.2026</a:t>
             </a:fld>
             <a:endParaRPr lang="ru-RU"/>
           </a:p>
@@ -769,7 +774,7 @@
           <a:p>
             <a:fld id="{49EED7A0-508C-42DE-B7A9-52DA1C7DA46A}" type="datetimeFigureOut">
               <a:rPr lang="ru-RU" smtClean="0"/>
-              <a:t>07.06.2026</a:t>
+              <a:t>08.06.2026</a:t>
             </a:fld>
             <a:endParaRPr lang="ru-RU"/>
           </a:p>
@@ -1015,7 +1020,7 @@
           <a:p>
             <a:fld id="{49EED7A0-508C-42DE-B7A9-52DA1C7DA46A}" type="datetimeFigureOut">
               <a:rPr lang="ru-RU" smtClean="0"/>
-              <a:t>07.06.2026</a:t>
+              <a:t>08.06.2026</a:t>
             </a:fld>
             <a:endParaRPr lang="ru-RU"/>
           </a:p>
@@ -1247,7 +1252,7 @@
           <a:p>
             <a:fld id="{49EED7A0-508C-42DE-B7A9-52DA1C7DA46A}" type="datetimeFigureOut">
               <a:rPr lang="ru-RU" smtClean="0"/>
-              <a:t>07.06.2026</a:t>
+              <a:t>08.06.2026</a:t>
             </a:fld>
             <a:endParaRPr lang="ru-RU"/>
           </a:p>
@@ -1614,7 +1619,7 @@
           <a:p>
             <a:fld id="{49EED7A0-508C-42DE-B7A9-52DA1C7DA46A}" type="datetimeFigureOut">
               <a:rPr lang="ru-RU" smtClean="0"/>
-              <a:t>07.06.2026</a:t>
+              <a:t>08.06.2026</a:t>
             </a:fld>
             <a:endParaRPr lang="ru-RU"/>
           </a:p>
@@ -1732,7 +1737,7 @@
           <a:p>
             <a:fld id="{49EED7A0-508C-42DE-B7A9-52DA1C7DA46A}" type="datetimeFigureOut">
               <a:rPr lang="ru-RU" smtClean="0"/>
-              <a:t>07.06.2026</a:t>
+              <a:t>08.06.2026</a:t>
             </a:fld>
             <a:endParaRPr lang="ru-RU"/>
           </a:p>
@@ -1827,7 +1832,7 @@
           <a:p>
             <a:fld id="{49EED7A0-508C-42DE-B7A9-52DA1C7DA46A}" type="datetimeFigureOut">
               <a:rPr lang="ru-RU" smtClean="0"/>
-              <a:t>07.06.2026</a:t>
+              <a:t>08.06.2026</a:t>
             </a:fld>
             <a:endParaRPr lang="ru-RU"/>
           </a:p>
@@ -2104,7 +2109,7 @@
           <a:p>
             <a:fld id="{49EED7A0-508C-42DE-B7A9-52DA1C7DA46A}" type="datetimeFigureOut">
               <a:rPr lang="ru-RU" smtClean="0"/>
-              <a:t>07.06.2026</a:t>
+              <a:t>08.06.2026</a:t>
             </a:fld>
             <a:endParaRPr lang="ru-RU"/>
           </a:p>
@@ -2357,7 +2362,7 @@
           <a:p>
             <a:fld id="{49EED7A0-508C-42DE-B7A9-52DA1C7DA46A}" type="datetimeFigureOut">
               <a:rPr lang="ru-RU" smtClean="0"/>
-              <a:t>07.06.2026</a:t>
+              <a:t>08.06.2026</a:t>
             </a:fld>
             <a:endParaRPr lang="ru-RU"/>
           </a:p>
@@ -2570,7 +2575,7 @@
           <a:p>
             <a:fld id="{49EED7A0-508C-42DE-B7A9-52DA1C7DA46A}" type="datetimeFigureOut">
               <a:rPr lang="ru-RU" smtClean="0"/>
-              <a:t>07.06.2026</a:t>
+              <a:t>08.06.2026</a:t>
             </a:fld>
             <a:endParaRPr lang="ru-RU"/>
           </a:p>
@@ -3081,7 +3086,6 @@
               <a:rPr lang="ru-RU" sz="2800" dirty="0" smtClean="0"/>
               <a:t>Проверил: Метелкин А. С.</a:t>
             </a:r>
-            <a:endParaRPr lang="ru-RU" sz="2800" dirty="0" smtClean="0"/>
           </a:p>
           <a:p>
             <a:r>
@@ -3176,6 +3180,12 @@
           <a:prstGeom prst="roundRect">
             <a:avLst/>
           </a:prstGeom>
+          <a:solidFill>
+            <a:schemeClr val="accent1">
+              <a:lumMod val="40000"/>
+              <a:lumOff val="60000"/>
+            </a:schemeClr>
+          </a:solidFill>
         </p:spPr>
         <p:style>
           <a:lnRef idx="2">
@@ -3216,6 +3226,12 @@
           <a:prstGeom prst="roundRect">
             <a:avLst/>
           </a:prstGeom>
+          <a:solidFill>
+            <a:schemeClr val="accent2">
+              <a:lumMod val="60000"/>
+              <a:lumOff val="40000"/>
+            </a:schemeClr>
+          </a:solidFill>
         </p:spPr>
         <p:style>
           <a:lnRef idx="2">
@@ -3250,8 +3266,8 @@
         </p:nvSpPr>
         <p:spPr>
           <a:xfrm>
-            <a:off x="1392620" y="3896401"/>
-            <a:ext cx="9406759" cy="2601310"/>
+            <a:off x="2386898" y="3896401"/>
+            <a:ext cx="7418201" cy="2601310"/>
           </a:xfrm>
           <a:prstGeom prst="roundRect">
             <a:avLst/>
@@ -3259,15 +3275,15 @@
         </p:spPr>
         <p:style>
           <a:lnRef idx="2">
-            <a:schemeClr val="accent1">
+            <a:schemeClr val="dk1">
               <a:shade val="50000"/>
             </a:schemeClr>
           </a:lnRef>
           <a:fillRef idx="1">
-            <a:schemeClr val="accent1"/>
+            <a:schemeClr val="dk1"/>
           </a:fillRef>
           <a:effectRef idx="0">
-            <a:schemeClr val="accent1"/>
+            <a:schemeClr val="dk1"/>
           </a:effectRef>
           <a:fontRef idx="minor">
             <a:schemeClr val="lt1"/>
@@ -3526,8 +3542,8 @@
         </p:nvSpPr>
         <p:spPr>
           <a:xfrm>
-            <a:off x="1615440" y="3922628"/>
-            <a:ext cx="7543800" cy="2554545"/>
+            <a:off x="3001754" y="3914485"/>
+            <a:ext cx="6188491" cy="2585323"/>
           </a:xfrm>
           <a:prstGeom prst="rect">
             <a:avLst/>
@@ -3541,183 +3557,384 @@
           <a:lstStyle/>
           <a:p>
             <a:r>
-              <a:rPr lang="en-US" sz="1600" dirty="0"/>
+              <a:rPr lang="en-US" dirty="0">
+                <a:solidFill>
+                  <a:srgbClr val="E1A2F8"/>
+                </a:solidFill>
+              </a:rPr>
               <a:t>@</a:t>
             </a:r>
             <a:r>
-              <a:rPr lang="en-US" sz="1600" dirty="0" err="1"/>
+              <a:rPr lang="en-US" dirty="0" err="1">
+                <a:solidFill>
+                  <a:srgbClr val="E1A2F8"/>
+                </a:solidFill>
+              </a:rPr>
               <a:t>Autowired</a:t>
             </a:r>
-            <a:endParaRPr lang="en-US" sz="1600" dirty="0"/>
-          </a:p>
-          <a:p>
-            <a:r>
-              <a:rPr lang="en-US" sz="1600" dirty="0"/>
+            <a:endParaRPr lang="en-US" dirty="0">
+              <a:solidFill>
+                <a:srgbClr val="E1A2F8"/>
+              </a:solidFill>
+            </a:endParaRPr>
+          </a:p>
+          <a:p>
+            <a:r>
+              <a:rPr lang="en-US" dirty="0">
+                <a:solidFill>
+                  <a:srgbClr val="E1A2F8"/>
+                </a:solidFill>
+              </a:rPr>
               <a:t>@Qualifier</a:t>
             </a:r>
           </a:p>
           <a:p>
             <a:r>
-              <a:rPr lang="en-US" sz="1600" dirty="0"/>
+              <a:rPr lang="en-US" dirty="0">
+                <a:solidFill>
+                  <a:schemeClr val="bg1"/>
+                </a:solidFill>
+              </a:rPr>
               <a:t>("</a:t>
             </a:r>
             <a:r>
-              <a:rPr lang="en-US" sz="1600" dirty="0" err="1"/>
+              <a:rPr lang="en-US" dirty="0" err="1">
+                <a:solidFill>
+                  <a:schemeClr val="bg1"/>
+                </a:solidFill>
+              </a:rPr>
               <a:t>dbMoviePort</a:t>
             </a:r>
             <a:r>
-              <a:rPr lang="en-US" sz="1600" dirty="0"/>
-              <a:t>") private </a:t>
-            </a:r>
-            <a:r>
-              <a:rPr lang="en-US" sz="1600" dirty="0" err="1"/>
+              <a:rPr lang="en-US" dirty="0">
+                <a:solidFill>
+                  <a:schemeClr val="bg1"/>
+                </a:solidFill>
+              </a:rPr>
+              <a:t>")</a:t>
+            </a:r>
+            <a:r>
+              <a:rPr lang="en-US" dirty="0">
+                <a:solidFill>
+                  <a:srgbClr val="00B0F0"/>
+                </a:solidFill>
+              </a:rPr>
+              <a:t> private</a:t>
+            </a:r>
+            <a:r>
+              <a:rPr lang="en-US" dirty="0"/>
+              <a:t> </a:t>
+            </a:r>
+            <a:r>
+              <a:rPr lang="en-US" dirty="0" err="1">
+                <a:solidFill>
+                  <a:schemeClr val="bg1"/>
+                </a:solidFill>
+              </a:rPr>
               <a:t>MoviePort</a:t>
             </a:r>
             <a:r>
-              <a:rPr lang="en-US" sz="1600" dirty="0"/>
+              <a:rPr lang="en-US" dirty="0">
+                <a:solidFill>
+                  <a:schemeClr val="bg1"/>
+                </a:solidFill>
+              </a:rPr>
               <a:t> </a:t>
             </a:r>
             <a:r>
-              <a:rPr lang="en-US" sz="1600" dirty="0" err="1"/>
+              <a:rPr lang="en-US" dirty="0" err="1">
+                <a:solidFill>
+                  <a:schemeClr val="bg1"/>
+                </a:solidFill>
+              </a:rPr>
               <a:t>dbAdapter</a:t>
             </a:r>
             <a:r>
-              <a:rPr lang="en-US" sz="1600" dirty="0"/>
+              <a:rPr lang="en-US" dirty="0">
+                <a:solidFill>
+                  <a:schemeClr val="bg1"/>
+                </a:solidFill>
+              </a:rPr>
               <a:t>;</a:t>
             </a:r>
             <a:r>
-              <a:rPr lang="en-US" sz="1600" dirty="0" smtClean="0"/>
+              <a:rPr lang="en-US" dirty="0" smtClean="0"/>
               <a:t/>
             </a:r>
             <a:br>
-              <a:rPr lang="en-US" sz="1600" dirty="0" smtClean="0"/>
+              <a:rPr lang="en-US" dirty="0" smtClean="0"/>
             </a:br>
             <a:r>
-              <a:rPr lang="en-US" sz="1600" dirty="0"/>
+              <a:rPr lang="en-US" dirty="0">
+                <a:solidFill>
+                  <a:srgbClr val="E1A2F8"/>
+                </a:solidFill>
+              </a:rPr>
               <a:t>@</a:t>
             </a:r>
             <a:r>
-              <a:rPr lang="en-US" sz="1600" dirty="0" err="1"/>
+              <a:rPr lang="en-US" dirty="0" err="1">
+                <a:solidFill>
+                  <a:srgbClr val="E1A2F8"/>
+                </a:solidFill>
+              </a:rPr>
               <a:t>Autowired</a:t>
             </a:r>
-            <a:endParaRPr lang="en-US" sz="1600" dirty="0"/>
-          </a:p>
-          <a:p>
-            <a:r>
-              <a:rPr lang="en-US" sz="1600" dirty="0"/>
+            <a:endParaRPr lang="en-US" dirty="0">
+              <a:solidFill>
+                <a:srgbClr val="E1A2F8"/>
+              </a:solidFill>
+            </a:endParaRPr>
+          </a:p>
+          <a:p>
+            <a:r>
+              <a:rPr lang="en-US" dirty="0">
+                <a:solidFill>
+                  <a:srgbClr val="E1A2F8"/>
+                </a:solidFill>
+              </a:rPr>
               <a:t>@Qualifier</a:t>
             </a:r>
           </a:p>
           <a:p>
             <a:r>
-              <a:rPr lang="en-US" sz="1600" dirty="0"/>
+              <a:rPr lang="en-US" dirty="0">
+                <a:solidFill>
+                  <a:schemeClr val="bg1"/>
+                </a:solidFill>
+              </a:rPr>
               <a:t>("</a:t>
             </a:r>
             <a:r>
-              <a:rPr lang="en-US" sz="1600" dirty="0" err="1"/>
+              <a:rPr lang="en-US" dirty="0" err="1">
+                <a:solidFill>
+                  <a:schemeClr val="bg1"/>
+                </a:solidFill>
+              </a:rPr>
               <a:t>jsonMoviePort</a:t>
             </a:r>
             <a:r>
-              <a:rPr lang="en-US" sz="1600" dirty="0"/>
-              <a:t>") private </a:t>
-            </a:r>
-            <a:r>
-              <a:rPr lang="en-US" sz="1600" dirty="0" err="1"/>
+              <a:rPr lang="en-US" dirty="0">
+                <a:solidFill>
+                  <a:schemeClr val="bg1"/>
+                </a:solidFill>
+              </a:rPr>
+              <a:t>")</a:t>
+            </a:r>
+            <a:r>
+              <a:rPr lang="en-US" dirty="0"/>
+              <a:t> </a:t>
+            </a:r>
+            <a:r>
+              <a:rPr lang="en-US" dirty="0">
+                <a:solidFill>
+                  <a:srgbClr val="00B0F0"/>
+                </a:solidFill>
+              </a:rPr>
+              <a:t>private</a:t>
+            </a:r>
+            <a:r>
+              <a:rPr lang="en-US" dirty="0">
+                <a:solidFill>
+                  <a:schemeClr val="bg1"/>
+                </a:solidFill>
+              </a:rPr>
+              <a:t> </a:t>
+            </a:r>
+            <a:r>
+              <a:rPr lang="en-US" dirty="0" err="1">
+                <a:solidFill>
+                  <a:schemeClr val="bg1"/>
+                </a:solidFill>
+              </a:rPr>
               <a:t>MoviePort</a:t>
             </a:r>
             <a:r>
-              <a:rPr lang="en-US" sz="1600" dirty="0"/>
+              <a:rPr lang="en-US" dirty="0">
+                <a:solidFill>
+                  <a:schemeClr val="bg1"/>
+                </a:solidFill>
+              </a:rPr>
               <a:t> </a:t>
             </a:r>
             <a:r>
-              <a:rPr lang="en-US" sz="1600" dirty="0" err="1"/>
+              <a:rPr lang="en-US" dirty="0" err="1">
+                <a:solidFill>
+                  <a:schemeClr val="bg1"/>
+                </a:solidFill>
+              </a:rPr>
               <a:t>jsonAdapter</a:t>
             </a:r>
             <a:r>
-              <a:rPr lang="en-US" sz="1600" dirty="0"/>
+              <a:rPr lang="en-US" dirty="0" smtClean="0">
+                <a:solidFill>
+                  <a:schemeClr val="bg1"/>
+                </a:solidFill>
+              </a:rPr>
               <a:t>;</a:t>
             </a:r>
             <a:r>
-              <a:rPr lang="en-US" sz="1600" dirty="0" smtClean="0"/>
+              <a:rPr lang="en-US" dirty="0" smtClean="0"/>
               <a:t/>
             </a:r>
             <a:br>
-              <a:rPr lang="en-US" sz="1600" dirty="0" smtClean="0"/>
+              <a:rPr lang="en-US" dirty="0" smtClean="0"/>
             </a:br>
             <a:r>
-              <a:rPr lang="en-US" sz="1600" dirty="0" smtClean="0"/>
+              <a:rPr lang="en-US" dirty="0">
+                <a:solidFill>
+                  <a:srgbClr val="00B0F0"/>
+                </a:solidFill>
+              </a:rPr>
+              <a:t>private</a:t>
+            </a:r>
+            <a:r>
+              <a:rPr lang="en-US" dirty="0"/>
+              <a:t> </a:t>
+            </a:r>
+            <a:r>
+              <a:rPr lang="en-US" dirty="0" err="1">
+                <a:solidFill>
+                  <a:schemeClr val="bg1"/>
+                </a:solidFill>
+              </a:rPr>
+              <a:t>MoviePort</a:t>
+            </a:r>
+            <a:r>
+              <a:rPr lang="en-US" dirty="0">
+                <a:solidFill>
+                  <a:schemeClr val="bg1"/>
+                </a:solidFill>
+              </a:rPr>
+              <a:t> </a:t>
+            </a:r>
+            <a:r>
+              <a:rPr lang="en-US" dirty="0" err="1">
+                <a:solidFill>
+                  <a:schemeClr val="bg1"/>
+                </a:solidFill>
+              </a:rPr>
+              <a:t>currentPort</a:t>
+            </a:r>
+            <a:r>
+              <a:rPr lang="en-US" dirty="0">
+                <a:solidFill>
+                  <a:schemeClr val="bg1"/>
+                </a:solidFill>
+              </a:rPr>
+              <a:t>() {</a:t>
+            </a:r>
+            <a:r>
+              <a:rPr lang="en-US" dirty="0" smtClean="0">
+                <a:solidFill>
+                  <a:schemeClr val="bg1"/>
+                </a:solidFill>
+              </a:rPr>
               <a:t/>
             </a:r>
             <a:br>
-              <a:rPr lang="en-US" sz="1600" dirty="0" smtClean="0"/>
+              <a:rPr lang="en-US" dirty="0" smtClean="0">
+                <a:solidFill>
+                  <a:schemeClr val="bg1"/>
+                </a:solidFill>
+              </a:rPr>
             </a:br>
             <a:r>
-              <a:rPr lang="en-US" sz="1600" dirty="0"/>
-              <a:t>private </a:t>
-            </a:r>
-            <a:r>
-              <a:rPr lang="en-US" sz="1600" dirty="0" err="1"/>
-              <a:t>MoviePort</a:t>
-            </a:r>
-            <a:r>
-              <a:rPr lang="en-US" sz="1600" dirty="0"/>
-              <a:t> </a:t>
-            </a:r>
-            <a:r>
-              <a:rPr lang="en-US" sz="1600" dirty="0" err="1"/>
-              <a:t>currentPort</a:t>
-            </a:r>
-            <a:r>
-              <a:rPr lang="en-US" sz="1600" dirty="0"/>
-              <a:t>() {</a:t>
-            </a:r>
-            <a:r>
-              <a:rPr lang="en-US" sz="1600" dirty="0" smtClean="0"/>
+              <a:rPr lang="en-US" dirty="0"/>
+              <a:t>  </a:t>
+            </a:r>
+            <a:r>
+              <a:rPr lang="en-US" dirty="0">
+                <a:solidFill>
+                  <a:srgbClr val="00B0F0"/>
+                </a:solidFill>
+              </a:rPr>
+              <a:t>return</a:t>
+            </a:r>
+            <a:r>
+              <a:rPr lang="en-US" dirty="0">
+                <a:solidFill>
+                  <a:schemeClr val="bg1"/>
+                </a:solidFill>
+              </a:rPr>
+              <a:t> (mode == </a:t>
+            </a:r>
+            <a:r>
+              <a:rPr lang="en-US" dirty="0" err="1">
+                <a:solidFill>
+                  <a:schemeClr val="bg1"/>
+                </a:solidFill>
+              </a:rPr>
+              <a:t>DataMode.JSON</a:t>
+            </a:r>
+            <a:r>
+              <a:rPr lang="en-US" dirty="0">
+                <a:solidFill>
+                  <a:schemeClr val="bg1"/>
+                </a:solidFill>
+              </a:rPr>
+              <a:t>) ? </a:t>
+            </a:r>
+            <a:r>
+              <a:rPr lang="en-US" dirty="0" err="1">
+                <a:solidFill>
+                  <a:schemeClr val="bg1"/>
+                </a:solidFill>
+              </a:rPr>
+              <a:t>jsonAdapter</a:t>
+            </a:r>
+            <a:r>
+              <a:rPr lang="en-US" dirty="0">
+                <a:solidFill>
+                  <a:schemeClr val="bg1"/>
+                </a:solidFill>
+              </a:rPr>
+              <a:t> : </a:t>
+            </a:r>
+            <a:r>
+              <a:rPr lang="en-US" dirty="0" err="1">
+                <a:solidFill>
+                  <a:schemeClr val="bg1"/>
+                </a:solidFill>
+              </a:rPr>
+              <a:t>dbAdapter</a:t>
+            </a:r>
+            <a:r>
+              <a:rPr lang="en-US" dirty="0">
+                <a:solidFill>
+                  <a:schemeClr val="bg1"/>
+                </a:solidFill>
+              </a:rPr>
+              <a:t>;</a:t>
+            </a:r>
+            <a:r>
+              <a:rPr lang="en-US" dirty="0" smtClean="0">
+                <a:solidFill>
+                  <a:schemeClr val="bg1"/>
+                </a:solidFill>
+              </a:rPr>
               <a:t/>
             </a:r>
             <a:br>
-              <a:rPr lang="en-US" sz="1600" dirty="0" smtClean="0"/>
+              <a:rPr lang="en-US" dirty="0" smtClean="0">
+                <a:solidFill>
+                  <a:schemeClr val="bg1"/>
+                </a:solidFill>
+              </a:rPr>
             </a:br>
             <a:r>
-              <a:rPr lang="en-US" sz="1600" dirty="0"/>
-              <a:t>  return (mode == </a:t>
-            </a:r>
-            <a:r>
-              <a:rPr lang="en-US" sz="1600" dirty="0" err="1"/>
-              <a:t>DataMode.JSON</a:t>
-            </a:r>
-            <a:r>
-              <a:rPr lang="en-US" sz="1600" dirty="0"/>
-              <a:t>) ? </a:t>
-            </a:r>
-            <a:r>
-              <a:rPr lang="en-US" sz="1600" dirty="0" err="1"/>
-              <a:t>jsonAdapter</a:t>
-            </a:r>
-            <a:r>
-              <a:rPr lang="en-US" sz="1600" dirty="0"/>
-              <a:t> : </a:t>
-            </a:r>
-            <a:r>
-              <a:rPr lang="en-US" sz="1600" dirty="0" err="1"/>
-              <a:t>dbAdapter</a:t>
-            </a:r>
-            <a:r>
-              <a:rPr lang="en-US" sz="1600" dirty="0"/>
-              <a:t>;</a:t>
-            </a:r>
-            <a:r>
-              <a:rPr lang="en-US" sz="1600" dirty="0" smtClean="0"/>
-              <a:t/>
-            </a:r>
-            <a:br>
-              <a:rPr lang="en-US" sz="1600" dirty="0" smtClean="0"/>
-            </a:br>
-            <a:r>
-              <a:rPr lang="en-US" sz="1600" dirty="0"/>
+              <a:rPr lang="en-US" dirty="0">
+                <a:solidFill>
+                  <a:schemeClr val="bg1"/>
+                </a:solidFill>
+              </a:rPr>
               <a:t>}</a:t>
             </a:r>
-            <a:endParaRPr lang="ru-RU" sz="1600" dirty="0"/>
+            <a:endParaRPr lang="ru-RU" dirty="0">
+              <a:solidFill>
+                <a:schemeClr val="bg1"/>
+              </a:solidFill>
+            </a:endParaRPr>
           </a:p>
         </p:txBody>
       </p:sp>
@@ -3760,6 +3977,95 @@
       </p:grpSpPr>
       <p:sp>
         <p:nvSpPr>
+          <p:cNvPr id="10" name="Скругленный прямоугольник 9"/>
+          <p:cNvSpPr/>
+          <p:nvPr/>
+        </p:nvSpPr>
+        <p:spPr>
+          <a:xfrm>
+            <a:off x="1408746" y="5103627"/>
+            <a:ext cx="8734425" cy="742950"/>
+          </a:xfrm>
+          <a:prstGeom prst="roundRect">
+            <a:avLst/>
+          </a:prstGeom>
+          <a:solidFill>
+            <a:schemeClr val="accent6">
+              <a:lumMod val="40000"/>
+              <a:lumOff val="60000"/>
+            </a:schemeClr>
+          </a:solidFill>
+        </p:spPr>
+        <p:style>
+          <a:lnRef idx="2">
+            <a:schemeClr val="accent1">
+              <a:shade val="50000"/>
+            </a:schemeClr>
+          </a:lnRef>
+          <a:fillRef idx="1">
+            <a:schemeClr val="accent1"/>
+          </a:fillRef>
+          <a:effectRef idx="0">
+            <a:schemeClr val="accent1"/>
+          </a:effectRef>
+          <a:fontRef idx="minor">
+            <a:schemeClr val="lt1"/>
+          </a:fontRef>
+        </p:style>
+        <p:txBody>
+          <a:bodyPr rtlCol="0" anchor="ctr"/>
+          <a:lstStyle/>
+          <a:p>
+            <a:pPr algn="ctr"/>
+            <a:endParaRPr lang="ru-RU"/>
+          </a:p>
+        </p:txBody>
+      </p:sp>
+      <p:sp>
+        <p:nvSpPr>
+          <p:cNvPr id="5" name="Скругленный прямоугольник 4"/>
+          <p:cNvSpPr/>
+          <p:nvPr/>
+        </p:nvSpPr>
+        <p:spPr>
+          <a:xfrm>
+            <a:off x="948559" y="3209025"/>
+            <a:ext cx="10294882" cy="1678285"/>
+          </a:xfrm>
+          <a:prstGeom prst="roundRect">
+            <a:avLst/>
+          </a:prstGeom>
+          <a:solidFill>
+            <a:srgbClr val="7030A0"/>
+          </a:solidFill>
+        </p:spPr>
+        <p:style>
+          <a:lnRef idx="2">
+            <a:schemeClr val="accent1">
+              <a:shade val="50000"/>
+            </a:schemeClr>
+          </a:lnRef>
+          <a:fillRef idx="1">
+            <a:schemeClr val="accent1"/>
+          </a:fillRef>
+          <a:effectRef idx="0">
+            <a:schemeClr val="accent1"/>
+          </a:effectRef>
+          <a:fontRef idx="minor">
+            <a:schemeClr val="lt1"/>
+          </a:fontRef>
+        </p:style>
+        <p:txBody>
+          <a:bodyPr rtlCol="0" anchor="ctr"/>
+          <a:lstStyle/>
+          <a:p>
+            <a:pPr algn="ctr"/>
+            <a:endParaRPr lang="ru-RU"/>
+          </a:p>
+        </p:txBody>
+      </p:sp>
+      <p:sp>
+        <p:nvSpPr>
           <p:cNvPr id="2" name="Заголовок 1"/>
           <p:cNvSpPr>
             <a:spLocks noGrp="1"/>
@@ -3801,7 +4107,7 @@
         <p:spPr>
           <a:xfrm>
             <a:off x="213360" y="1088797"/>
-            <a:ext cx="4358640" cy="1754326"/>
+            <a:ext cx="5562600" cy="1754326"/>
           </a:xfrm>
           <a:prstGeom prst="rect">
             <a:avLst/>
@@ -3814,48 +4120,38 @@
           <a:lstStyle/>
           <a:p>
             <a:r>
-              <a:rPr lang="ru-RU" b="1" i="0" dirty="0" smtClean="0">
+              <a:rPr lang="en-US" b="1" i="0" dirty="0" err="1" smtClean="0">
                 <a:solidFill>
                   <a:srgbClr val="667EEA"/>
                 </a:solidFill>
                 <a:effectLst/>
                 <a:latin typeface="Times New Roman" panose="02020603050405020304" pitchFamily="18" charset="0"/>
               </a:rPr>
-              <a:t>📄 </a:t>
-            </a:r>
-            <a:r>
-              <a:rPr lang="en-US" b="1" i="0" dirty="0" err="1" smtClean="0">
+              <a:t>Thymeleaf</a:t>
+            </a:r>
+            <a:r>
+              <a:rPr lang="en-US" b="1" i="0" dirty="0" smtClean="0">
                 <a:solidFill>
                   <a:srgbClr val="667EEA"/>
                 </a:solidFill>
                 <a:effectLst/>
                 <a:latin typeface="Times New Roman" panose="02020603050405020304" pitchFamily="18" charset="0"/>
               </a:rPr>
-              <a:t>Thymeleaf</a:t>
-            </a:r>
-            <a:r>
-              <a:rPr lang="en-US" b="1" i="0" dirty="0" smtClean="0">
+              <a:t>-</a:t>
+            </a:r>
+            <a:r>
+              <a:rPr lang="ru-RU" b="1" i="0" dirty="0" smtClean="0">
                 <a:solidFill>
                   <a:srgbClr val="667EEA"/>
                 </a:solidFill>
                 <a:effectLst/>
                 <a:latin typeface="Times New Roman" panose="02020603050405020304" pitchFamily="18" charset="0"/>
               </a:rPr>
-              <a:t>-</a:t>
-            </a:r>
-            <a:r>
-              <a:rPr lang="ru-RU" b="1" i="0" dirty="0" smtClean="0">
-                <a:solidFill>
-                  <a:srgbClr val="667EEA"/>
-                </a:solidFill>
-                <a:effectLst/>
-                <a:latin typeface="Times New Roman" panose="02020603050405020304" pitchFamily="18" charset="0"/>
-              </a:rPr>
               <a:t>шаблоны</a:t>
             </a:r>
           </a:p>
           <a:p>
-            <a:pPr>
+            <a:pPr marL="285750" indent="-285750">
               <a:buFont typeface="Arial" panose="020B0604020202020204" pitchFamily="34" charset="0"/>
               <a:buChar char="•"/>
             </a:pPr>
@@ -3881,7 +4177,7 @@
             </a:r>
           </a:p>
           <a:p>
-            <a:pPr>
+            <a:pPr marL="285750" indent="-285750">
               <a:buFont typeface="Arial" panose="020B0604020202020204" pitchFamily="34" charset="0"/>
               <a:buChar char="•"/>
             </a:pPr>
@@ -3903,21 +4199,31 @@
                 <a:effectLst/>
                 <a:latin typeface="Times New Roman" panose="02020603050405020304" pitchFamily="18" charset="0"/>
               </a:rPr>
-              <a:t>movies/list.html - </a:t>
-            </a:r>
-            <a:r>
-              <a:rPr lang="ru-RU" b="0" i="0" dirty="0" smtClean="0">
+              <a:t>movies/list.html </a:t>
+            </a:r>
+            <a:r>
+              <a:rPr lang="en-US" b="0" i="0" dirty="0" smtClean="0">
                 <a:solidFill>
                   <a:srgbClr val="000000"/>
                 </a:solidFill>
                 <a:effectLst/>
                 <a:latin typeface="Times New Roman" panose="02020603050405020304" pitchFamily="18" charset="0"/>
               </a:rPr>
+              <a:t>- </a:t>
+            </a:r>
+            <a:r>
+              <a:rPr lang="ru-RU" b="0" i="0" dirty="0" smtClean="0">
+                <a:solidFill>
+                  <a:srgbClr val="000000"/>
+                </a:solidFill>
+                <a:effectLst/>
+                <a:latin typeface="Times New Roman" panose="02020603050405020304" pitchFamily="18" charset="0"/>
+              </a:rPr>
               <a:t>список фильмов</a:t>
             </a:r>
           </a:p>
           <a:p>
-            <a:pPr>
+            <a:pPr marL="285750" indent="-285750">
               <a:buFont typeface="Arial" panose="020B0604020202020204" pitchFamily="34" charset="0"/>
               <a:buChar char="•"/>
             </a:pPr>
@@ -3953,7 +4259,7 @@
             </a:r>
           </a:p>
           <a:p>
-            <a:pPr>
+            <a:pPr marL="285750" indent="-285750">
               <a:buFont typeface="Arial" panose="020B0604020202020204" pitchFamily="34" charset="0"/>
               <a:buChar char="•"/>
             </a:pPr>
@@ -3989,7 +4295,7 @@
             </a:r>
           </a:p>
           <a:p>
-            <a:pPr>
+            <a:pPr marL="285750" indent="-285750">
               <a:buFont typeface="Arial" panose="020B0604020202020204" pitchFamily="34" charset="0"/>
               <a:buChar char="•"/>
             </a:pPr>
@@ -4051,23 +4357,32 @@
         </p:nvSpPr>
         <p:spPr>
           <a:xfrm>
-            <a:off x="5775960" y="1088797"/>
-            <a:ext cx="6096000" cy="1477328"/>
+            <a:off x="5775959" y="1088797"/>
+            <a:ext cx="6416041" cy="1477328"/>
           </a:xfrm>
           <a:prstGeom prst="rect">
             <a:avLst/>
           </a:prstGeom>
         </p:spPr>
         <p:txBody>
-          <a:bodyPr>
+          <a:bodyPr wrap="square">
             <a:spAutoFit/>
           </a:bodyPr>
           <a:lstStyle/>
           <a:p>
             <a:r>
-              <a:rPr lang="ru-RU" b="1" dirty="0"/>
-              <a:t>🎨 CSS-дизайн</a:t>
-            </a:r>
+              <a:rPr lang="ru-RU" b="1" dirty="0" smtClean="0">
+                <a:solidFill>
+                  <a:srgbClr val="7030A0"/>
+                </a:solidFill>
+              </a:rPr>
+              <a:t>CSS-дизайн</a:t>
+            </a:r>
+            <a:endParaRPr lang="ru-RU" b="1" dirty="0">
+              <a:solidFill>
+                <a:srgbClr val="7030A0"/>
+              </a:solidFill>
+            </a:endParaRPr>
           </a:p>
           <a:p>
             <a:pPr marL="285750" indent="-285750">
@@ -4129,14 +4444,110 @@
       </p:sp>
       <p:sp>
         <p:nvSpPr>
+          <p:cNvPr id="7" name="Прямоугольник 6"/>
+          <p:cNvSpPr/>
+          <p:nvPr/>
+        </p:nvSpPr>
+        <p:spPr>
+          <a:xfrm>
+            <a:off x="1408746" y="5290436"/>
+            <a:ext cx="8734425" cy="369332"/>
+          </a:xfrm>
+          <a:prstGeom prst="rect">
+            <a:avLst/>
+          </a:prstGeom>
+        </p:spPr>
+        <p:txBody>
+          <a:bodyPr wrap="square">
+            <a:spAutoFit/>
+          </a:bodyPr>
+          <a:lstStyle/>
+          <a:p>
+            <a:r>
+              <a:rPr lang="ru-RU" b="1" i="0" dirty="0" smtClean="0">
+                <a:solidFill>
+                  <a:srgbClr val="000000"/>
+                </a:solidFill>
+                <a:effectLst/>
+                <a:latin typeface="Times New Roman" panose="02020603050405020304" pitchFamily="18" charset="0"/>
+              </a:rPr>
+              <a:t>🎭 Теги настроения:</a:t>
+            </a:r>
+            <a:r>
+              <a:rPr lang="ru-RU" b="0" i="0" dirty="0" smtClean="0">
+                <a:solidFill>
+                  <a:srgbClr val="000000"/>
+                </a:solidFill>
+                <a:effectLst/>
+                <a:latin typeface="Times New Roman" panose="02020603050405020304" pitchFamily="18" charset="0"/>
+              </a:rPr>
+              <a:t> </a:t>
+            </a:r>
+            <a:r>
+              <a:rPr lang="en-US" b="0" i="0" dirty="0" smtClean="0">
+                <a:solidFill>
+                  <a:srgbClr val="000000"/>
+                </a:solidFill>
+                <a:effectLst/>
+                <a:latin typeface="Times New Roman" panose="02020603050405020304" pitchFamily="18" charset="0"/>
+              </a:rPr>
+              <a:t>Calm, Romantic, Thrilling, Nostalgic, Chaotic, Existential</a:t>
+            </a:r>
+            <a:endParaRPr lang="ru-RU" dirty="0"/>
+          </a:p>
+        </p:txBody>
+      </p:sp>
+      <p:sp>
+        <p:nvSpPr>
+          <p:cNvPr id="9" name="Скругленный прямоугольник 8"/>
+          <p:cNvSpPr/>
+          <p:nvPr/>
+        </p:nvSpPr>
+        <p:spPr>
+          <a:xfrm>
+            <a:off x="1327192" y="3796817"/>
+            <a:ext cx="9537613" cy="1028035"/>
+          </a:xfrm>
+          <a:prstGeom prst="roundRect">
+            <a:avLst/>
+          </a:prstGeom>
+          <a:solidFill>
+            <a:srgbClr val="B942DE"/>
+          </a:solidFill>
+        </p:spPr>
+        <p:style>
+          <a:lnRef idx="2">
+            <a:schemeClr val="accent1"/>
+          </a:lnRef>
+          <a:fillRef idx="1">
+            <a:schemeClr val="lt1"/>
+          </a:fillRef>
+          <a:effectRef idx="0">
+            <a:schemeClr val="accent1"/>
+          </a:effectRef>
+          <a:fontRef idx="minor">
+            <a:schemeClr val="dk1"/>
+          </a:fontRef>
+        </p:style>
+        <p:txBody>
+          <a:bodyPr rtlCol="0" anchor="ctr"/>
+          <a:lstStyle/>
+          <a:p>
+            <a:pPr algn="ctr"/>
+            <a:endParaRPr lang="ru-RU"/>
+          </a:p>
+        </p:txBody>
+      </p:sp>
+      <p:sp>
+        <p:nvSpPr>
           <p:cNvPr id="6" name="Прямоугольник 5"/>
           <p:cNvSpPr/>
           <p:nvPr/>
         </p:nvSpPr>
         <p:spPr>
           <a:xfrm>
-            <a:off x="1356360" y="3209025"/>
-            <a:ext cx="9479280" cy="1200329"/>
+            <a:off x="1327193" y="3285066"/>
+            <a:ext cx="9537613" cy="1477328"/>
           </a:xfrm>
           <a:prstGeom prst="rect">
             <a:avLst/>
@@ -4150,162 +4561,223 @@
           <a:p>
             <a:r>
               <a:rPr lang="ru-RU" dirty="0" smtClean="0"/>
-              <a:t>🎥 HTML5-плеер:</a:t>
-            </a:r>
-          </a:p>
-          <a:p>
-            <a:r>
-              <a:rPr lang="ru-RU" dirty="0" smtClean="0"/>
+              <a:t>🎥 </a:t>
+            </a:r>
+            <a:r>
+              <a:rPr lang="ru-RU" dirty="0" smtClean="0">
+                <a:solidFill>
+                  <a:schemeClr val="bg1"/>
+                </a:solidFill>
+              </a:rPr>
+              <a:t>HTML5-плеер:</a:t>
+            </a:r>
+            <a:endParaRPr lang="en-US" dirty="0" smtClean="0">
+              <a:solidFill>
+                <a:schemeClr val="bg1"/>
+              </a:solidFill>
+            </a:endParaRPr>
+          </a:p>
+          <a:p>
+            <a:endParaRPr lang="ru-RU" dirty="0" smtClean="0">
+              <a:solidFill>
+                <a:schemeClr val="bg1"/>
+              </a:solidFill>
+            </a:endParaRPr>
+          </a:p>
+          <a:p>
+            <a:r>
+              <a:rPr lang="ru-RU" dirty="0" smtClean="0">
+                <a:solidFill>
+                  <a:schemeClr val="bg1"/>
+                </a:solidFill>
+              </a:rPr>
               <a:t>&lt;</a:t>
             </a:r>
             <a:r>
-              <a:rPr lang="ru-RU" dirty="0" err="1" smtClean="0"/>
+              <a:rPr lang="ru-RU" dirty="0" err="1" smtClean="0">
+                <a:solidFill>
+                  <a:schemeClr val="bg1"/>
+                </a:solidFill>
+              </a:rPr>
               <a:t>video</a:t>
             </a:r>
             <a:r>
-              <a:rPr lang="ru-RU" dirty="0" smtClean="0"/>
+              <a:rPr lang="ru-RU" dirty="0" smtClean="0">
+                <a:solidFill>
+                  <a:schemeClr val="bg1"/>
+                </a:solidFill>
+              </a:rPr>
               <a:t> </a:t>
             </a:r>
             <a:r>
-              <a:rPr lang="ru-RU" dirty="0" err="1" smtClean="0"/>
+              <a:rPr lang="ru-RU" dirty="0" err="1" smtClean="0">
+                <a:solidFill>
+                  <a:schemeClr val="bg1"/>
+                </a:solidFill>
+              </a:rPr>
               <a:t>width</a:t>
             </a:r>
             <a:r>
-              <a:rPr lang="ru-RU" dirty="0" smtClean="0"/>
+              <a:rPr lang="ru-RU" dirty="0" smtClean="0">
+                <a:solidFill>
+                  <a:schemeClr val="bg1"/>
+                </a:solidFill>
+              </a:rPr>
               <a:t>="800" </a:t>
             </a:r>
             <a:r>
-              <a:rPr lang="ru-RU" dirty="0" err="1" smtClean="0"/>
+              <a:rPr lang="ru-RU" dirty="0" err="1" smtClean="0">
+                <a:solidFill>
+                  <a:schemeClr val="bg1"/>
+                </a:solidFill>
+              </a:rPr>
               <a:t>controls</a:t>
             </a:r>
             <a:r>
-              <a:rPr lang="ru-RU" dirty="0" smtClean="0"/>
+              <a:rPr lang="ru-RU" dirty="0" smtClean="0">
+                <a:solidFill>
+                  <a:schemeClr val="bg1"/>
+                </a:solidFill>
+              </a:rPr>
               <a:t>&gt;</a:t>
             </a:r>
           </a:p>
           <a:p>
             <a:r>
-              <a:rPr lang="ru-RU" dirty="0" smtClean="0"/>
+              <a:rPr lang="ru-RU" dirty="0" smtClean="0">
+                <a:solidFill>
+                  <a:schemeClr val="bg1"/>
+                </a:solidFill>
+              </a:rPr>
               <a:t>  &lt;</a:t>
             </a:r>
             <a:r>
-              <a:rPr lang="ru-RU" dirty="0" err="1" smtClean="0"/>
+              <a:rPr lang="ru-RU" dirty="0" err="1" smtClean="0">
+                <a:solidFill>
+                  <a:schemeClr val="bg1"/>
+                </a:solidFill>
+              </a:rPr>
               <a:t>source</a:t>
             </a:r>
             <a:r>
-              <a:rPr lang="ru-RU" dirty="0" smtClean="0"/>
+              <a:rPr lang="ru-RU" dirty="0" smtClean="0">
+                <a:solidFill>
+                  <a:schemeClr val="bg1"/>
+                </a:solidFill>
+              </a:rPr>
               <a:t> </a:t>
             </a:r>
             <a:r>
-              <a:rPr lang="ru-RU" dirty="0" err="1" smtClean="0"/>
+              <a:rPr lang="ru-RU" dirty="0" err="1" smtClean="0">
+                <a:solidFill>
+                  <a:schemeClr val="bg1"/>
+                </a:solidFill>
+              </a:rPr>
               <a:t>th:src</a:t>
             </a:r>
             <a:r>
-              <a:rPr lang="ru-RU" dirty="0" smtClean="0"/>
+              <a:rPr lang="ru-RU" dirty="0" smtClean="0">
+                <a:solidFill>
+                  <a:schemeClr val="bg1"/>
+                </a:solidFill>
+              </a:rPr>
               <a:t>="@{'/</a:t>
             </a:r>
             <a:r>
-              <a:rPr lang="ru-RU" dirty="0" err="1" smtClean="0"/>
+              <a:rPr lang="ru-RU" dirty="0" err="1" smtClean="0">
+                <a:solidFill>
+                  <a:schemeClr val="bg1"/>
+                </a:solidFill>
+              </a:rPr>
               <a:t>media</a:t>
             </a:r>
             <a:r>
-              <a:rPr lang="ru-RU" dirty="0" smtClean="0"/>
+              <a:rPr lang="ru-RU" dirty="0" smtClean="0">
+                <a:solidFill>
+                  <a:schemeClr val="bg1"/>
+                </a:solidFill>
+              </a:rPr>
               <a:t>/'+${</a:t>
             </a:r>
             <a:r>
-              <a:rPr lang="ru-RU" dirty="0" err="1" smtClean="0"/>
+              <a:rPr lang="ru-RU" dirty="0" err="1" smtClean="0">
+                <a:solidFill>
+                  <a:schemeClr val="bg1"/>
+                </a:solidFill>
+              </a:rPr>
               <a:t>movie.filePath</a:t>
             </a:r>
             <a:r>
-              <a:rPr lang="ru-RU" dirty="0" smtClean="0"/>
+              <a:rPr lang="ru-RU" dirty="0" smtClean="0">
+                <a:solidFill>
+                  <a:schemeClr val="bg1"/>
+                </a:solidFill>
+              </a:rPr>
               <a:t>}}" </a:t>
             </a:r>
             <a:r>
-              <a:rPr lang="ru-RU" dirty="0" err="1" smtClean="0"/>
+              <a:rPr lang="ru-RU" dirty="0" err="1" smtClean="0">
+                <a:solidFill>
+                  <a:schemeClr val="bg1"/>
+                </a:solidFill>
+              </a:rPr>
               <a:t>type</a:t>
             </a:r>
             <a:r>
-              <a:rPr lang="ru-RU" dirty="0" smtClean="0"/>
+              <a:rPr lang="ru-RU" dirty="0" smtClean="0">
+                <a:solidFill>
+                  <a:schemeClr val="bg1"/>
+                </a:solidFill>
+              </a:rPr>
               <a:t>="</a:t>
             </a:r>
             <a:r>
-              <a:rPr lang="ru-RU" dirty="0" err="1" smtClean="0"/>
+              <a:rPr lang="ru-RU" dirty="0" err="1" smtClean="0">
+                <a:solidFill>
+                  <a:schemeClr val="bg1"/>
+                </a:solidFill>
+              </a:rPr>
               <a:t>video</a:t>
             </a:r>
             <a:r>
-              <a:rPr lang="ru-RU" dirty="0" smtClean="0"/>
+              <a:rPr lang="ru-RU" dirty="0" smtClean="0">
+                <a:solidFill>
+                  <a:schemeClr val="bg1"/>
+                </a:solidFill>
+              </a:rPr>
               <a:t>/mp4"&gt;</a:t>
             </a:r>
           </a:p>
           <a:p>
             <a:r>
-              <a:rPr lang="ru-RU" dirty="0" smtClean="0"/>
+              <a:rPr lang="ru-RU" dirty="0" smtClean="0">
+                <a:solidFill>
+                  <a:schemeClr val="bg1"/>
+                </a:solidFill>
+              </a:rPr>
               <a:t>&lt;/</a:t>
             </a:r>
             <a:r>
-              <a:rPr lang="ru-RU" dirty="0" err="1" smtClean="0"/>
+              <a:rPr lang="ru-RU" dirty="0" err="1" smtClean="0">
+                <a:solidFill>
+                  <a:schemeClr val="bg1"/>
+                </a:solidFill>
+              </a:rPr>
               <a:t>video</a:t>
             </a:r>
             <a:r>
-              <a:rPr lang="ru-RU" dirty="0" smtClean="0"/>
+              <a:rPr lang="ru-RU" dirty="0" smtClean="0">
+                <a:solidFill>
+                  <a:schemeClr val="bg1"/>
+                </a:solidFill>
+              </a:rPr>
               <a:t>&gt;</a:t>
             </a:r>
-            <a:endParaRPr lang="ru-RU" dirty="0"/>
-          </a:p>
-        </p:txBody>
-      </p:sp>
-      <p:sp>
-        <p:nvSpPr>
-          <p:cNvPr id="7" name="Прямоугольник 6"/>
-          <p:cNvSpPr/>
-          <p:nvPr/>
-        </p:nvSpPr>
-        <p:spPr>
-          <a:xfrm>
-            <a:off x="1691640" y="4775256"/>
-            <a:ext cx="8808720" cy="369332"/>
-          </a:xfrm>
-          <a:prstGeom prst="rect">
-            <a:avLst/>
-          </a:prstGeom>
-        </p:spPr>
-        <p:txBody>
-          <a:bodyPr wrap="square">
-            <a:spAutoFit/>
-          </a:bodyPr>
-          <a:lstStyle/>
-          <a:p>
-            <a:r>
-              <a:rPr lang="ru-RU" b="1" i="0" dirty="0" smtClean="0">
-                <a:solidFill>
-                  <a:srgbClr val="000000"/>
-                </a:solidFill>
-                <a:effectLst/>
-                <a:latin typeface="Times New Roman" panose="02020603050405020304" pitchFamily="18" charset="0"/>
-              </a:rPr>
-              <a:t>🎭 Теги настроения:</a:t>
-            </a:r>
-            <a:r>
-              <a:rPr lang="ru-RU" b="0" i="0" dirty="0" smtClean="0">
-                <a:solidFill>
-                  <a:srgbClr val="000000"/>
-                </a:solidFill>
-                <a:effectLst/>
-                <a:latin typeface="Times New Roman" panose="02020603050405020304" pitchFamily="18" charset="0"/>
-              </a:rPr>
-              <a:t> </a:t>
-            </a:r>
-            <a:r>
-              <a:rPr lang="en-US" b="0" i="0" dirty="0" smtClean="0">
-                <a:solidFill>
-                  <a:srgbClr val="000000"/>
-                </a:solidFill>
-                <a:effectLst/>
-                <a:latin typeface="Times New Roman" panose="02020603050405020304" pitchFamily="18" charset="0"/>
-              </a:rPr>
-              <a:t>Calm, Romantic, Thrilling, Nostalgic, Chaotic, Existential</a:t>
-            </a:r>
-            <a:endParaRPr lang="ru-RU" dirty="0"/>
+            <a:endParaRPr lang="ru-RU" dirty="0">
+              <a:solidFill>
+                <a:schemeClr val="bg1"/>
+              </a:solidFill>
+            </a:endParaRPr>
           </a:p>
         </p:txBody>
       </p:sp>
@@ -4348,6 +4820,187 @@
       </p:grpSpPr>
       <p:sp>
         <p:nvSpPr>
+          <p:cNvPr id="7" name="Скругленный прямоугольник 6"/>
+          <p:cNvSpPr/>
+          <p:nvPr/>
+        </p:nvSpPr>
+        <p:spPr>
+          <a:xfrm>
+            <a:off x="1815657" y="5778221"/>
+            <a:ext cx="8560676" cy="907241"/>
+          </a:xfrm>
+          <a:prstGeom prst="roundRect">
+            <a:avLst/>
+          </a:prstGeom>
+          <a:solidFill>
+            <a:schemeClr val="accent4">
+              <a:lumMod val="20000"/>
+              <a:lumOff val="80000"/>
+            </a:schemeClr>
+          </a:solidFill>
+        </p:spPr>
+        <p:style>
+          <a:lnRef idx="2">
+            <a:schemeClr val="accent1">
+              <a:shade val="50000"/>
+            </a:schemeClr>
+          </a:lnRef>
+          <a:fillRef idx="1">
+            <a:schemeClr val="accent1"/>
+          </a:fillRef>
+          <a:effectRef idx="0">
+            <a:schemeClr val="accent1"/>
+          </a:effectRef>
+          <a:fontRef idx="minor">
+            <a:schemeClr val="lt1"/>
+          </a:fontRef>
+        </p:style>
+        <p:txBody>
+          <a:bodyPr rtlCol="0" anchor="ctr"/>
+          <a:lstStyle/>
+          <a:p>
+            <a:pPr algn="ctr"/>
+            <a:endParaRPr lang="ru-RU"/>
+          </a:p>
+        </p:txBody>
+      </p:sp>
+      <p:sp>
+        <p:nvSpPr>
+          <p:cNvPr id="5" name="Скругленный прямоугольник 4"/>
+          <p:cNvSpPr/>
+          <p:nvPr/>
+        </p:nvSpPr>
+        <p:spPr>
+          <a:xfrm>
+            <a:off x="204951" y="977462"/>
+            <a:ext cx="5579417" cy="3030448"/>
+          </a:xfrm>
+          <a:prstGeom prst="roundRect">
+            <a:avLst/>
+          </a:prstGeom>
+          <a:solidFill>
+            <a:schemeClr val="accent6">
+              <a:lumMod val="40000"/>
+              <a:lumOff val="60000"/>
+            </a:schemeClr>
+          </a:solidFill>
+        </p:spPr>
+        <p:style>
+          <a:lnRef idx="2">
+            <a:schemeClr val="accent1">
+              <a:shade val="50000"/>
+            </a:schemeClr>
+          </a:lnRef>
+          <a:fillRef idx="1">
+            <a:schemeClr val="accent1"/>
+          </a:fillRef>
+          <a:effectRef idx="0">
+            <a:schemeClr val="accent1"/>
+          </a:effectRef>
+          <a:fontRef idx="minor">
+            <a:schemeClr val="lt1"/>
+          </a:fontRef>
+        </p:style>
+        <p:txBody>
+          <a:bodyPr rtlCol="0" anchor="ctr"/>
+          <a:lstStyle/>
+          <a:p>
+            <a:pPr algn="ctr"/>
+            <a:endParaRPr lang="ru-RU"/>
+          </a:p>
+        </p:txBody>
+      </p:sp>
+      <p:sp>
+        <p:nvSpPr>
+          <p:cNvPr id="8" name="Скругленный прямоугольник 7"/>
+          <p:cNvSpPr/>
+          <p:nvPr/>
+        </p:nvSpPr>
+        <p:spPr>
+          <a:xfrm>
+            <a:off x="6575796" y="977461"/>
+            <a:ext cx="5407573" cy="3030449"/>
+          </a:xfrm>
+          <a:prstGeom prst="roundRect">
+            <a:avLst/>
+          </a:prstGeom>
+          <a:solidFill>
+            <a:schemeClr val="accent5">
+              <a:lumMod val="40000"/>
+              <a:lumOff val="60000"/>
+            </a:schemeClr>
+          </a:solidFill>
+        </p:spPr>
+        <p:style>
+          <a:lnRef idx="2">
+            <a:schemeClr val="accent1">
+              <a:shade val="50000"/>
+            </a:schemeClr>
+          </a:lnRef>
+          <a:fillRef idx="1">
+            <a:schemeClr val="accent1"/>
+          </a:fillRef>
+          <a:effectRef idx="0">
+            <a:schemeClr val="accent1"/>
+          </a:effectRef>
+          <a:fontRef idx="minor">
+            <a:schemeClr val="lt1"/>
+          </a:fontRef>
+        </p:style>
+        <p:txBody>
+          <a:bodyPr rtlCol="0" anchor="ctr"/>
+          <a:lstStyle/>
+          <a:p>
+            <a:pPr algn="ctr"/>
+            <a:endParaRPr lang="ru-RU"/>
+          </a:p>
+        </p:txBody>
+      </p:sp>
+      <p:sp>
+        <p:nvSpPr>
+          <p:cNvPr id="10" name="Скругленный прямоугольник 9"/>
+          <p:cNvSpPr/>
+          <p:nvPr/>
+        </p:nvSpPr>
+        <p:spPr>
+          <a:xfrm>
+            <a:off x="669374" y="4332170"/>
+            <a:ext cx="10853244" cy="1294329"/>
+          </a:xfrm>
+          <a:prstGeom prst="roundRect">
+            <a:avLst/>
+          </a:prstGeom>
+          <a:solidFill>
+            <a:srgbClr val="B942DE"/>
+          </a:solidFill>
+        </p:spPr>
+        <p:style>
+          <a:lnRef idx="2">
+            <a:schemeClr val="accent1">
+              <a:shade val="50000"/>
+            </a:schemeClr>
+          </a:lnRef>
+          <a:fillRef idx="1">
+            <a:schemeClr val="accent1"/>
+          </a:fillRef>
+          <a:effectRef idx="0">
+            <a:schemeClr val="accent1"/>
+          </a:effectRef>
+          <a:fontRef idx="minor">
+            <a:schemeClr val="lt1"/>
+          </a:fontRef>
+        </p:style>
+        <p:txBody>
+          <a:bodyPr rtlCol="0" anchor="ctr"/>
+          <a:lstStyle/>
+          <a:p>
+            <a:pPr algn="ctr"/>
+            <a:endParaRPr lang="ru-RU"/>
+          </a:p>
+        </p:txBody>
+      </p:sp>
+      <p:sp>
+        <p:nvSpPr>
           <p:cNvPr id="2" name="Заголовок 1"/>
           <p:cNvSpPr>
             <a:spLocks noGrp="1"/>
@@ -4384,21 +5037,21 @@
         </p:nvSpPr>
         <p:spPr>
           <a:xfrm>
-            <a:off x="411480" y="1117938"/>
-            <a:ext cx="6096000" cy="2031325"/>
+            <a:off x="204951" y="977461"/>
+            <a:ext cx="5579417" cy="2739211"/>
           </a:xfrm>
           <a:prstGeom prst="rect">
             <a:avLst/>
           </a:prstGeom>
         </p:spPr>
         <p:txBody>
-          <a:bodyPr>
+          <a:bodyPr wrap="square">
             <a:spAutoFit/>
           </a:bodyPr>
           <a:lstStyle/>
           <a:p>
             <a:r>
-              <a:rPr lang="ru-RU" b="1" i="0" dirty="0" smtClean="0">
+              <a:rPr lang="ru-RU" sz="2800" b="1" i="0" dirty="0" smtClean="0">
                 <a:solidFill>
                   <a:srgbClr val="155724"/>
                 </a:solidFill>
@@ -4409,12 +5062,12 @@
             </a:r>
           </a:p>
           <a:p>
-            <a:pPr>
+            <a:pPr marL="285750" indent="-285750">
               <a:buFont typeface="Arial" panose="020B0604020202020204" pitchFamily="34" charset="0"/>
               <a:buChar char="•"/>
             </a:pPr>
             <a:r>
-              <a:rPr lang="ru-RU" b="0" i="0" dirty="0" smtClean="0">
+              <a:rPr lang="ru-RU" sz="2400" b="0" i="0" dirty="0" smtClean="0">
                 <a:solidFill>
                   <a:srgbClr val="000000"/>
                 </a:solidFill>
@@ -4425,12 +5078,12 @@
             </a:r>
           </a:p>
           <a:p>
-            <a:pPr>
+            <a:pPr marL="285750" indent="-285750">
               <a:buFont typeface="Arial" panose="020B0604020202020204" pitchFamily="34" charset="0"/>
               <a:buChar char="•"/>
             </a:pPr>
             <a:r>
-              <a:rPr lang="ru-RU" b="0" i="0" dirty="0" smtClean="0">
+              <a:rPr lang="ru-RU" sz="2400" b="0" i="0" dirty="0" smtClean="0">
                 <a:solidFill>
                   <a:srgbClr val="000000"/>
                 </a:solidFill>
@@ -4441,12 +5094,12 @@
             </a:r>
           </a:p>
           <a:p>
-            <a:pPr>
+            <a:pPr marL="285750" indent="-285750">
               <a:buFont typeface="Arial" panose="020B0604020202020204" pitchFamily="34" charset="0"/>
               <a:buChar char="•"/>
             </a:pPr>
             <a:r>
-              <a:rPr lang="ru-RU" b="0" i="0" dirty="0" smtClean="0">
+              <a:rPr lang="ru-RU" sz="2400" b="0" i="0" dirty="0" smtClean="0">
                 <a:solidFill>
                   <a:srgbClr val="000000"/>
                 </a:solidFill>
@@ -4457,12 +5110,12 @@
             </a:r>
           </a:p>
           <a:p>
-            <a:pPr>
+            <a:pPr marL="285750" indent="-285750">
               <a:buFont typeface="Arial" panose="020B0604020202020204" pitchFamily="34" charset="0"/>
               <a:buChar char="•"/>
             </a:pPr>
             <a:r>
-              <a:rPr lang="ru-RU" b="0" i="0" dirty="0" smtClean="0">
+              <a:rPr lang="ru-RU" sz="2400" b="0" i="0" dirty="0" smtClean="0">
                 <a:solidFill>
                   <a:srgbClr val="000000"/>
                 </a:solidFill>
@@ -4473,12 +5126,12 @@
             </a:r>
           </a:p>
           <a:p>
-            <a:pPr>
+            <a:pPr marL="285750" indent="-285750">
               <a:buFont typeface="Arial" panose="020B0604020202020204" pitchFamily="34" charset="0"/>
               <a:buChar char="•"/>
             </a:pPr>
             <a:r>
-              <a:rPr lang="ru-RU" b="0" i="0" dirty="0" smtClean="0">
+              <a:rPr lang="ru-RU" sz="2400" b="0" i="0" dirty="0" smtClean="0">
                 <a:solidFill>
                   <a:srgbClr val="000000"/>
                 </a:solidFill>
@@ -4489,12 +5142,12 @@
             </a:r>
           </a:p>
           <a:p>
-            <a:pPr>
+            <a:pPr marL="285750" indent="-285750">
               <a:buFont typeface="Arial" panose="020B0604020202020204" pitchFamily="34" charset="0"/>
               <a:buChar char="•"/>
             </a:pPr>
             <a:r>
-              <a:rPr lang="ru-RU" b="0" i="0" dirty="0" smtClean="0">
+              <a:rPr lang="ru-RU" sz="2400" b="0" i="0" dirty="0" smtClean="0">
                 <a:solidFill>
                   <a:srgbClr val="000000"/>
                 </a:solidFill>
@@ -4503,7 +5156,7 @@
               </a:rPr>
               <a:t>Навигация по эпизодам</a:t>
             </a:r>
-            <a:endParaRPr lang="ru-RU" b="0" i="0" dirty="0">
+            <a:endParaRPr lang="ru-RU" sz="2400" b="0" i="0" dirty="0">
               <a:solidFill>
                 <a:srgbClr val="000000"/>
               </a:solidFill>
@@ -4521,8 +5174,8 @@
         </p:nvSpPr>
         <p:spPr>
           <a:xfrm>
-            <a:off x="6385560" y="1117937"/>
-            <a:ext cx="6096000" cy="2031325"/>
+            <a:off x="6575796" y="993993"/>
+            <a:ext cx="6096000" cy="2369880"/>
           </a:xfrm>
           <a:prstGeom prst="rect">
             <a:avLst/>
@@ -4535,7 +5188,7 @@
           <a:lstStyle/>
           <a:p>
             <a:r>
-              <a:rPr lang="ru-RU" b="1" i="0" dirty="0" smtClean="0">
+              <a:rPr lang="ru-RU" sz="2800" b="1" i="0" dirty="0" smtClean="0">
                 <a:solidFill>
                   <a:srgbClr val="0C5460"/>
                 </a:solidFill>
@@ -4546,12 +5199,12 @@
             </a:r>
           </a:p>
           <a:p>
-            <a:pPr>
+            <a:pPr marL="285750" indent="-285750">
               <a:buFont typeface="Arial" panose="020B0604020202020204" pitchFamily="34" charset="0"/>
               <a:buChar char="•"/>
             </a:pPr>
             <a:r>
-              <a:rPr lang="en-US" b="0" i="0" dirty="0" smtClean="0">
+              <a:rPr lang="en-US" sz="2400" b="0" i="0" dirty="0" smtClean="0">
                 <a:solidFill>
                   <a:srgbClr val="000000"/>
                 </a:solidFill>
@@ -4562,12 +5215,12 @@
             </a:r>
           </a:p>
           <a:p>
-            <a:pPr>
+            <a:pPr marL="285750" indent="-285750">
               <a:buFont typeface="Arial" panose="020B0604020202020204" pitchFamily="34" charset="0"/>
               <a:buChar char="•"/>
             </a:pPr>
             <a:r>
-              <a:rPr lang="en-US" b="0" i="0" dirty="0" err="1" smtClean="0">
+              <a:rPr lang="en-US" sz="2400" b="0" i="0" dirty="0" err="1" smtClean="0">
                 <a:solidFill>
                   <a:srgbClr val="000000"/>
                 </a:solidFill>
@@ -4577,7 +5230,7 @@
               <a:t>Mockito</a:t>
             </a:r>
             <a:r>
-              <a:rPr lang="en-US" b="0" i="0" dirty="0" smtClean="0">
+              <a:rPr lang="en-US" sz="2400" b="0" i="0" dirty="0" smtClean="0">
                 <a:solidFill>
                   <a:srgbClr val="000000"/>
                 </a:solidFill>
@@ -4587,7 +5240,7 @@
               <a:t> 5.x - </a:t>
             </a:r>
             <a:r>
-              <a:rPr lang="ru-RU" b="0" i="0" dirty="0" err="1" smtClean="0">
+              <a:rPr lang="ru-RU" sz="2400" b="0" i="0" dirty="0" err="1" smtClean="0">
                 <a:solidFill>
                   <a:srgbClr val="000000"/>
                 </a:solidFill>
@@ -4596,7 +5249,7 @@
               </a:rPr>
               <a:t>мокирование</a:t>
             </a:r>
-            <a:endParaRPr lang="ru-RU" b="0" i="0" dirty="0" smtClean="0">
+            <a:endParaRPr lang="ru-RU" sz="2400" b="0" i="0" dirty="0" smtClean="0">
               <a:solidFill>
                 <a:srgbClr val="000000"/>
               </a:solidFill>
@@ -4605,12 +5258,12 @@
             </a:endParaRPr>
           </a:p>
           <a:p>
-            <a:pPr>
+            <a:pPr marL="285750" indent="-285750">
               <a:buFont typeface="Arial" panose="020B0604020202020204" pitchFamily="34" charset="0"/>
               <a:buChar char="•"/>
             </a:pPr>
             <a:r>
-              <a:rPr lang="en-US" b="0" i="0" dirty="0" err="1" smtClean="0">
+              <a:rPr lang="en-US" sz="2400" b="0" i="0" dirty="0" err="1" smtClean="0">
                 <a:solidFill>
                   <a:srgbClr val="000000"/>
                 </a:solidFill>
@@ -4620,7 +5273,7 @@
               <a:t>AssertJ</a:t>
             </a:r>
             <a:r>
-              <a:rPr lang="en-US" b="0" i="0" dirty="0" smtClean="0">
+              <a:rPr lang="en-US" sz="2400" b="0" i="0" dirty="0" smtClean="0">
                 <a:solidFill>
                   <a:srgbClr val="000000"/>
                 </a:solidFill>
@@ -4631,12 +5284,12 @@
             </a:r>
           </a:p>
           <a:p>
-            <a:pPr>
+            <a:pPr marL="285750" indent="-285750">
               <a:buFont typeface="Arial" panose="020B0604020202020204" pitchFamily="34" charset="0"/>
               <a:buChar char="•"/>
             </a:pPr>
             <a:r>
-              <a:rPr lang="en-US" b="0" i="0" dirty="0" smtClean="0">
+              <a:rPr lang="en-US" sz="2400" b="0" i="0" dirty="0" smtClean="0">
                 <a:solidFill>
                   <a:srgbClr val="000000"/>
                 </a:solidFill>
@@ -4647,12 +5300,12 @@
             </a:r>
           </a:p>
           <a:p>
-            <a:pPr>
+            <a:pPr marL="285750" indent="-285750">
               <a:buFont typeface="Arial" panose="020B0604020202020204" pitchFamily="34" charset="0"/>
               <a:buChar char="•"/>
             </a:pPr>
             <a:r>
-              <a:rPr lang="en-US" b="0" i="0" dirty="0" err="1" smtClean="0">
+              <a:rPr lang="en-US" sz="2400" b="0" i="0" dirty="0" err="1" smtClean="0">
                 <a:solidFill>
                   <a:srgbClr val="000000"/>
                 </a:solidFill>
@@ -4661,7 +5314,7 @@
               </a:rPr>
               <a:t>ReflectionTestUtils</a:t>
             </a:r>
-            <a:endParaRPr lang="en-US" b="0" i="0" dirty="0" smtClean="0">
+            <a:endParaRPr lang="en-US" sz="2400" b="0" i="0" dirty="0" smtClean="0">
               <a:solidFill>
                 <a:srgbClr val="000000"/>
               </a:solidFill>
@@ -4669,29 +5322,6 @@
               <a:latin typeface="Times New Roman" panose="02020603050405020304" pitchFamily="18" charset="0"/>
             </a:endParaRPr>
           </a:p>
-          <a:p>
-            <a:pPr>
-              <a:buFont typeface="Arial" panose="020B0604020202020204" pitchFamily="34" charset="0"/>
-              <a:buChar char="•"/>
-            </a:pPr>
-            <a:r>
-              <a:rPr lang="ru-RU" b="1" i="0" dirty="0" smtClean="0">
-                <a:solidFill>
-                  <a:srgbClr val="000000"/>
-                </a:solidFill>
-                <a:effectLst/>
-                <a:latin typeface="Times New Roman" panose="02020603050405020304" pitchFamily="18" charset="0"/>
-              </a:rPr>
-              <a:t>Все тесты проходят успешно</a:t>
-            </a:r>
-            <a:endParaRPr lang="ru-RU" b="0" i="0" dirty="0">
-              <a:solidFill>
-                <a:srgbClr val="000000"/>
-              </a:solidFill>
-              <a:effectLst/>
-              <a:latin typeface="Times New Roman" panose="02020603050405020304" pitchFamily="18" charset="0"/>
-            </a:endParaRPr>
-          </a:p>
         </p:txBody>
       </p:sp>
       <p:sp>
@@ -4702,8 +5332,8 @@
         </p:nvSpPr>
         <p:spPr>
           <a:xfrm>
-            <a:off x="2308860" y="3544304"/>
-            <a:ext cx="7574280" cy="923330"/>
+            <a:off x="1271747" y="4332170"/>
+            <a:ext cx="9648497" cy="1384995"/>
           </a:xfrm>
           <a:prstGeom prst="rect">
             <a:avLst/>
@@ -4717,7 +5347,11 @@
           <a:p>
             <a:pPr algn="ctr"/>
             <a:r>
-              <a:rPr lang="ru-RU" dirty="0" smtClean="0"/>
+              <a:rPr lang="ru-RU" sz="2800" dirty="0" smtClean="0">
+                <a:solidFill>
+                  <a:schemeClr val="bg1"/>
+                </a:solidFill>
+              </a:rPr>
               <a:t>Итоговые результаты:</a:t>
             </a:r>
           </a:p>
@@ -4725,21 +5359,138 @@
             <a:pPr algn="ctr">
               <a:tabLst>
                 <a:tab pos="1524000" algn="l"/>
-                <a:tab pos="3946525" algn="l"/>
+                <a:tab pos="2774950" algn="l"/>
+                <a:tab pos="3311525" algn="l"/>
+                <a:tab pos="4035425" algn="l"/>
+                <a:tab pos="5911850" algn="l"/>
               </a:tabLst>
             </a:pPr>
             <a:r>
-              <a:rPr lang="ru-RU" dirty="0" smtClean="0"/>
-              <a:t>8	 16	 2</a:t>
-            </a:r>
-          </a:p>
-          <a:p>
-            <a:pPr algn="ctr"/>
-            <a:r>
-              <a:rPr lang="ru-RU" dirty="0" smtClean="0"/>
-              <a:t>Сущностей	 Адаптеров	 Режима хранения</a:t>
-            </a:r>
-            <a:endParaRPr lang="ru-RU" dirty="0"/>
+              <a:rPr lang="ru-RU" sz="2800" dirty="0" smtClean="0">
+                <a:solidFill>
+                  <a:schemeClr val="bg1"/>
+                </a:solidFill>
+              </a:rPr>
+              <a:t>8	</a:t>
+            </a:r>
+            <a:r>
+              <a:rPr lang="en-US" sz="2800" dirty="0" smtClean="0">
+                <a:solidFill>
+                  <a:schemeClr val="bg1"/>
+                </a:solidFill>
+              </a:rPr>
+              <a:t>	</a:t>
+            </a:r>
+            <a:r>
+              <a:rPr lang="ru-RU" sz="2800" dirty="0" smtClean="0">
+                <a:solidFill>
+                  <a:schemeClr val="bg1"/>
+                </a:solidFill>
+              </a:rPr>
+              <a:t> 16</a:t>
+            </a:r>
+            <a:r>
+              <a:rPr lang="en-US" sz="2800" dirty="0" smtClean="0">
+                <a:solidFill>
+                  <a:schemeClr val="bg1"/>
+                </a:solidFill>
+              </a:rPr>
+              <a:t>		</a:t>
+            </a:r>
+            <a:r>
+              <a:rPr lang="ru-RU" sz="2800" dirty="0" smtClean="0">
+                <a:solidFill>
+                  <a:schemeClr val="bg1"/>
+                </a:solidFill>
+              </a:rPr>
+              <a:t>	 2</a:t>
+            </a:r>
+          </a:p>
+          <a:p>
+            <a:pPr algn="ctr">
+              <a:tabLst>
+                <a:tab pos="993775" algn="l"/>
+                <a:tab pos="1703388" algn="l"/>
+                <a:tab pos="3311525" algn="l"/>
+              </a:tabLst>
+            </a:pPr>
+            <a:r>
+              <a:rPr lang="ru-RU" sz="2800" dirty="0" smtClean="0">
+                <a:solidFill>
+                  <a:schemeClr val="bg1"/>
+                </a:solidFill>
+              </a:rPr>
+              <a:t>Сущностей	</a:t>
+            </a:r>
+            <a:r>
+              <a:rPr lang="en-US" sz="2800" dirty="0" smtClean="0">
+                <a:solidFill>
+                  <a:schemeClr val="bg1"/>
+                </a:solidFill>
+              </a:rPr>
+              <a:t>	</a:t>
+            </a:r>
+            <a:r>
+              <a:rPr lang="ru-RU" sz="2800" dirty="0" smtClean="0">
+                <a:solidFill>
+                  <a:schemeClr val="bg1"/>
+                </a:solidFill>
+              </a:rPr>
+              <a:t> </a:t>
+            </a:r>
+            <a:r>
+              <a:rPr lang="en-US" sz="2800" dirty="0" smtClean="0">
+                <a:solidFill>
+                  <a:schemeClr val="bg1"/>
+                </a:solidFill>
+              </a:rPr>
+              <a:t>     </a:t>
+            </a:r>
+            <a:r>
+              <a:rPr lang="ru-RU" sz="2800" dirty="0" smtClean="0">
+                <a:solidFill>
+                  <a:schemeClr val="bg1"/>
+                </a:solidFill>
+              </a:rPr>
+              <a:t>Адаптеров</a:t>
+            </a:r>
+            <a:r>
+              <a:rPr lang="ru-RU" sz="2800" dirty="0" smtClean="0">
+                <a:solidFill>
+                  <a:schemeClr val="bg1"/>
+                </a:solidFill>
+              </a:rPr>
+              <a:t>	</a:t>
+            </a:r>
+            <a:r>
+              <a:rPr lang="en-US" sz="2800" dirty="0" smtClean="0">
+                <a:solidFill>
+                  <a:schemeClr val="bg1"/>
+                </a:solidFill>
+              </a:rPr>
+              <a:t>	</a:t>
+            </a:r>
+            <a:r>
+              <a:rPr lang="ru-RU" sz="2800" dirty="0" smtClean="0">
+                <a:solidFill>
+                  <a:schemeClr val="bg1"/>
+                </a:solidFill>
+              </a:rPr>
+              <a:t> </a:t>
+            </a:r>
+            <a:r>
+              <a:rPr lang="ru-RU" sz="2800" dirty="0" smtClean="0">
+                <a:solidFill>
+                  <a:schemeClr val="bg1"/>
+                </a:solidFill>
+              </a:rPr>
+              <a:t>Режима хранения</a:t>
+            </a:r>
+            <a:endParaRPr lang="ru-RU" sz="2800" dirty="0">
+              <a:solidFill>
+                <a:schemeClr val="bg1"/>
+              </a:solidFill>
+            </a:endParaRPr>
           </a:p>
         </p:txBody>
       </p:sp>
@@ -4751,12 +5502,15 @@
         </p:nvSpPr>
         <p:spPr>
           <a:xfrm>
-            <a:off x="3546712" y="4996934"/>
-            <a:ext cx="5098575" cy="369332"/>
+            <a:off x="2185725" y="5980387"/>
+            <a:ext cx="4617098" cy="523220"/>
           </a:xfrm>
           <a:prstGeom prst="rect">
             <a:avLst/>
           </a:prstGeom>
+          <a:ln>
+            <a:noFill/>
+          </a:ln>
         </p:spPr>
         <p:txBody>
           <a:bodyPr wrap="none">
@@ -4765,10 +5519,46 @@
           <a:lstStyle/>
           <a:p>
             <a:r>
-              <a:rPr lang="ru-RU" dirty="0" smtClean="0"/>
-              <a:t>🌐 Приложение доступно на: http://localhost:8080</a:t>
-            </a:r>
-            <a:endParaRPr lang="ru-RU" dirty="0"/>
+              <a:rPr lang="ru-RU" sz="2800" dirty="0" smtClean="0"/>
+              <a:t>🌐 Приложение доступно на</a:t>
+            </a:r>
+            <a:r>
+              <a:rPr lang="ru-RU" sz="2800" dirty="0" smtClean="0"/>
+              <a:t>:</a:t>
+            </a:r>
+            <a:endParaRPr lang="ru-RU" sz="2800" dirty="0"/>
+          </a:p>
+        </p:txBody>
+      </p:sp>
+      <p:sp>
+        <p:nvSpPr>
+          <p:cNvPr id="11" name="Прямоугольник 10"/>
+          <p:cNvSpPr/>
+          <p:nvPr/>
+        </p:nvSpPr>
+        <p:spPr>
+          <a:xfrm>
+            <a:off x="6802823" y="5991560"/>
+            <a:ext cx="3306354" cy="523220"/>
+          </a:xfrm>
+          <a:prstGeom prst="rect">
+            <a:avLst/>
+          </a:prstGeom>
+          <a:solidFill>
+            <a:schemeClr val="bg1"/>
+          </a:solidFill>
+        </p:spPr>
+        <p:txBody>
+          <a:bodyPr wrap="none">
+            <a:spAutoFit/>
+          </a:bodyPr>
+          <a:lstStyle/>
+          <a:p>
+            <a:r>
+              <a:rPr lang="ru-RU" sz="2800" dirty="0"/>
+              <a:t>http://localhost:8080</a:t>
+            </a:r>
+            <a:endParaRPr lang="ru-RU" sz="2800" dirty="0"/>
           </a:p>
         </p:txBody>
       </p:sp>
@@ -4992,7 +5782,6 @@
               <a:rPr lang="ru-RU" sz="2400" dirty="0"/>
               <a:t>Тестирование и отладка разработанного сервиса</a:t>
             </a:r>
-            <a:endParaRPr lang="ru-RU" sz="2400" dirty="0"/>
           </a:p>
         </p:txBody>
       </p:sp>
